--- a/dist/초6/국어/토론과글쓰기/초6_국어_토론과글쓰기_01_토론하기.pptx
+++ b/dist/초6/국어/토론과글쓰기/초6_국어_토론과글쓰기_01_토론하기.pptx
@@ -121,13 +121,13 @@
   <p:extLst>
     <p:ext uri="{521415D9-36F7-43E2-AB2F-B90AF26B5E84}">
       <p14:sectionLst xmlns:p14="http://schemas.microsoft.com/office/powerpoint/2010/main">
-        <p14:section name="도입" id="{02b905d0-47ad-2a92-3791-cb95d527f75b}">
+        <p14:section name="도입" id="{fd686e59-bc88-7ee6-35b7-f5a8692a9848}">
           <p14:sldIdLst>
             <p14:sldId id="256"/>
             <p14:sldId id="257"/>
           </p14:sldIdLst>
         </p14:section>
-        <p14:section name="개념" id="{de04b8d4-111d-8d1b-0494-69222ab41859}">
+        <p14:section name="개념" id="{91c75a6e-3ed2-6c33-e73c-b94b63b4d438}">
           <p14:sldIdLst>
             <p14:sldId id="258"/>
             <p14:sldId id="259"/>
@@ -136,26 +136,26 @@
             <p14:sldId id="262"/>
           </p14:sldIdLst>
         </p14:section>
-        <p14:section name="연습" id="{095788f2-b84c-8249-2600-1923a411fb64}">
+        <p14:section name="연습" id="{1a4a6f92-65b0-6cc6-6050-ddda2e1babc1}">
           <p14:sldIdLst>
             <p14:sldId id="263"/>
             <p14:sldId id="264"/>
             <p14:sldId id="265"/>
           </p14:sldIdLst>
         </p14:section>
-        <p14:section name="확인" id="{aa546526-f4f5-947e-3794-a65cfc5e756b}">
+        <p14:section name="확인" id="{d6bfd57e-bdd7-46d0-d889-a0f9791d7dd4}">
           <p14:sldIdLst>
             <p14:sldId id="266"/>
             <p14:sldId id="267"/>
             <p14:sldId id="268"/>
           </p14:sldIdLst>
         </p14:section>
-        <p14:section name="정리" id="{b48e72ce-5d51-fd48-0661-ffff5121960a}">
+        <p14:section name="정리" id="{2f4f8664-3f21-8f69-aff3-c344ae3231f1}">
           <p14:sldIdLst>
             <p14:sldId id="269"/>
           </p14:sldIdLst>
         </p14:section>
-        <p14:section name="보충" id="{08e5d5ee-1697-a2c2-e310-f10da0818ff1}">
+        <p14:section name="보충" id="{1c94fbc6-b8cc-59c4-77e7-a0a573ec1ff5}">
           <p14:sldIdLst>
             <p14:sldId id="270"/>
           </p14:sldIdLst>
